--- a/material/[SeSAC_YDP_6] 00_양식.pptx
+++ b/material/[SeSAC_YDP_6] 00_양식.pptx
@@ -2,7 +2,7 @@
 <file path=ppt/presentation.xml><?xml version="1.0" encoding="utf-8"?>
 <p:presentation xmlns:a="http://schemas.openxmlformats.org/drawingml/2006/main" xmlns:r="http://schemas.openxmlformats.org/officeDocument/2006/relationships" xmlns:p="http://schemas.openxmlformats.org/presentationml/2006/main" saveSubsetFonts="1">
   <p:sldMasterIdLst>
-    <p:sldMasterId id="2147483660" r:id="rId1"/>
+    <p:sldMasterId id="2147483686" r:id="rId1"/>
   </p:sldMasterIdLst>
   <p:notesMasterIdLst>
     <p:notesMasterId r:id="rId7"/>
@@ -204,7 +204,7 @@
           <a:p>
             <a:fld id="{2EF3F159-7250-4DD4-91C2-13B35D56E1AF}" type="datetimeFigureOut">
               <a:rPr lang="ko-KR" altLang="en-US" smtClean="0"/>
-              <a:t>2024-04-29</a:t>
+              <a:t>2024-05-10</a:t>
             </a:fld>
             <a:endParaRPr lang="ko-KR" altLang="en-US"/>
           </a:p>
@@ -793,7 +793,7 @@
           <a:p>
             <a:fld id="{0E19CB95-6D28-40F1-9DA3-1BAC5D4B5B4F}" type="datetime6">
               <a:rPr lang="ko-KR" altLang="en-US" smtClean="0"/>
-              <a:t>2024년 4월</a:t>
+              <a:t>2024년 5월</a:t>
             </a:fld>
             <a:endParaRPr lang="ko-KR" altLang="en-US"/>
           </a:p>
@@ -948,7 +948,7 @@
     </p:spTree>
     <p:extLst>
       <p:ext uri="{BB962C8B-B14F-4D97-AF65-F5344CB8AC3E}">
-        <p14:creationId xmlns:p14="http://schemas.microsoft.com/office/powerpoint/2010/main" val="634369350"/>
+        <p14:creationId xmlns:p14="http://schemas.microsoft.com/office/powerpoint/2010/main" val="1169144088"/>
       </p:ext>
     </p:extLst>
   </p:cSld>
@@ -1173,7 +1173,7 @@
           <a:p>
             <a:fld id="{C4A39A32-5728-48B8-9F9C-437D214CCAF1}" type="datetime6">
               <a:rPr lang="ko-KR" altLang="en-US" smtClean="0"/>
-              <a:t>2024년 4월</a:t>
+              <a:t>2024년 5월</a:t>
             </a:fld>
             <a:endParaRPr lang="ko-KR" altLang="en-US"/>
           </a:p>
@@ -1236,7 +1236,7 @@
     </p:spTree>
     <p:extLst>
       <p:ext uri="{BB962C8B-B14F-4D97-AF65-F5344CB8AC3E}">
-        <p14:creationId xmlns:p14="http://schemas.microsoft.com/office/powerpoint/2010/main" val="3540422409"/>
+        <p14:creationId xmlns:p14="http://schemas.microsoft.com/office/powerpoint/2010/main" val="3639349226"/>
       </p:ext>
     </p:extLst>
   </p:cSld>
@@ -1375,7 +1375,7 @@
           <a:p>
             <a:fld id="{3BECC8BA-EBCB-4BF9-8E87-970CE0138376}" type="datetime6">
               <a:rPr lang="ko-KR" altLang="en-US" smtClean="0"/>
-              <a:t>2024년 4월</a:t>
+              <a:t>2024년 5월</a:t>
             </a:fld>
             <a:endParaRPr lang="ko-KR" altLang="en-US"/>
           </a:p>
@@ -1438,7 +1438,7 @@
     </p:spTree>
     <p:extLst>
       <p:ext uri="{BB962C8B-B14F-4D97-AF65-F5344CB8AC3E}">
-        <p14:creationId xmlns:p14="http://schemas.microsoft.com/office/powerpoint/2010/main" val="123487665"/>
+        <p14:creationId xmlns:p14="http://schemas.microsoft.com/office/powerpoint/2010/main" val="3122686972"/>
       </p:ext>
     </p:extLst>
   </p:cSld>
@@ -1583,7 +1583,7 @@
           <a:p>
             <a:fld id="{7869FA6E-4699-4AC6-B2CB-4E60A58ED7A8}" type="datetime6">
               <a:rPr lang="ko-KR" altLang="en-US" smtClean="0"/>
-              <a:t>2024년 4월</a:t>
+              <a:t>2024년 5월</a:t>
             </a:fld>
             <a:endParaRPr lang="ko-KR" altLang="en-US"/>
           </a:p>
@@ -1646,7 +1646,7 @@
     </p:spTree>
     <p:extLst>
       <p:ext uri="{BB962C8B-B14F-4D97-AF65-F5344CB8AC3E}">
-        <p14:creationId xmlns:p14="http://schemas.microsoft.com/office/powerpoint/2010/main" val="4023031345"/>
+        <p14:creationId xmlns:p14="http://schemas.microsoft.com/office/powerpoint/2010/main" val="2569466493"/>
       </p:ext>
     </p:extLst>
   </p:cSld>
@@ -1696,7 +1696,7 @@
           <a:p>
             <a:fld id="{0E19CB95-6D28-40F1-9DA3-1BAC5D4B5B4F}" type="datetime6">
               <a:rPr lang="ko-KR" altLang="en-US" smtClean="0"/>
-              <a:t>2024년 4월</a:t>
+              <a:t>2024년 5월</a:t>
             </a:fld>
             <a:endParaRPr lang="ko-KR" altLang="en-US"/>
           </a:p>
@@ -1851,7 +1851,7 @@
     </p:spTree>
     <p:extLst>
       <p:ext uri="{BB962C8B-B14F-4D97-AF65-F5344CB8AC3E}">
-        <p14:creationId xmlns:p14="http://schemas.microsoft.com/office/powerpoint/2010/main" val="4090886354"/>
+        <p14:creationId xmlns:p14="http://schemas.microsoft.com/office/powerpoint/2010/main" val="3855475712"/>
       </p:ext>
     </p:extLst>
   </p:cSld>
@@ -1958,7 +1958,7 @@
           <a:p>
             <a:fld id="{3C9CE3CE-253F-4F9D-BA15-C226C8D8501E}" type="datetime6">
               <a:rPr lang="ko-KR" altLang="en-US" smtClean="0"/>
-              <a:t>2024년 4월</a:t>
+              <a:t>2024년 5월</a:t>
             </a:fld>
             <a:endParaRPr lang="ko-KR" altLang="en-US"/>
           </a:p>
@@ -2063,7 +2063,7 @@
     </p:spTree>
     <p:extLst>
       <p:ext uri="{BB962C8B-B14F-4D97-AF65-F5344CB8AC3E}">
-        <p14:creationId xmlns:p14="http://schemas.microsoft.com/office/powerpoint/2010/main" val="1372250051"/>
+        <p14:creationId xmlns:p14="http://schemas.microsoft.com/office/powerpoint/2010/main" val="2336735569"/>
       </p:ext>
     </p:extLst>
   </p:cSld>
@@ -2275,7 +2275,7 @@
           <a:p>
             <a:fld id="{BE5A7087-D460-46DD-B430-F8D9B9677D08}" type="datetime6">
               <a:rPr lang="ko-KR" altLang="en-US" smtClean="0"/>
-              <a:t>2024년 4월</a:t>
+              <a:t>2024년 5월</a:t>
             </a:fld>
             <a:endParaRPr lang="ko-KR" altLang="en-US"/>
           </a:p>
@@ -2338,7 +2338,7 @@
     </p:spTree>
     <p:extLst>
       <p:ext uri="{BB962C8B-B14F-4D97-AF65-F5344CB8AC3E}">
-        <p14:creationId xmlns:p14="http://schemas.microsoft.com/office/powerpoint/2010/main" val="4178984951"/>
+        <p14:creationId xmlns:p14="http://schemas.microsoft.com/office/powerpoint/2010/main" val="748271591"/>
       </p:ext>
     </p:extLst>
   </p:cSld>
@@ -2544,7 +2544,7 @@
           <a:p>
             <a:fld id="{0581BA25-D675-4234-A003-8449BDEEF18E}" type="datetime6">
               <a:rPr lang="ko-KR" altLang="en-US" smtClean="0"/>
-              <a:t>2024년 4월</a:t>
+              <a:t>2024년 5월</a:t>
             </a:fld>
             <a:endParaRPr lang="ko-KR" altLang="en-US"/>
           </a:p>
@@ -2607,7 +2607,7 @@
     </p:spTree>
     <p:extLst>
       <p:ext uri="{BB962C8B-B14F-4D97-AF65-F5344CB8AC3E}">
-        <p14:creationId xmlns:p14="http://schemas.microsoft.com/office/powerpoint/2010/main" val="795749551"/>
+        <p14:creationId xmlns:p14="http://schemas.microsoft.com/office/powerpoint/2010/main" val="309343626"/>
       </p:ext>
     </p:extLst>
   </p:cSld>
@@ -2960,7 +2960,7 @@
           <a:p>
             <a:fld id="{26155C29-A87F-46F0-A24C-6C9F0A4BF6AA}" type="datetime6">
               <a:rPr lang="ko-KR" altLang="en-US" smtClean="0"/>
-              <a:t>2024년 4월</a:t>
+              <a:t>2024년 5월</a:t>
             </a:fld>
             <a:endParaRPr lang="ko-KR" altLang="en-US"/>
           </a:p>
@@ -3023,7 +3023,7 @@
     </p:spTree>
     <p:extLst>
       <p:ext uri="{BB962C8B-B14F-4D97-AF65-F5344CB8AC3E}">
-        <p14:creationId xmlns:p14="http://schemas.microsoft.com/office/powerpoint/2010/main" val="3237000226"/>
+        <p14:creationId xmlns:p14="http://schemas.microsoft.com/office/powerpoint/2010/main" val="4034777141"/>
       </p:ext>
     </p:extLst>
   </p:cSld>
@@ -3105,7 +3105,7 @@
           <a:p>
             <a:fld id="{DD2EDD62-8757-43DB-BAE0-460422B548EA}" type="datetime6">
               <a:rPr lang="ko-KR" altLang="en-US" smtClean="0"/>
-              <a:t>2024년 4월</a:t>
+              <a:t>2024년 5월</a:t>
             </a:fld>
             <a:endParaRPr lang="ko-KR" altLang="en-US"/>
           </a:p>
@@ -3168,7 +3168,7 @@
     </p:spTree>
     <p:extLst>
       <p:ext uri="{BB962C8B-B14F-4D97-AF65-F5344CB8AC3E}">
-        <p14:creationId xmlns:p14="http://schemas.microsoft.com/office/powerpoint/2010/main" val="2999748364"/>
+        <p14:creationId xmlns:p14="http://schemas.microsoft.com/office/powerpoint/2010/main" val="3854938237"/>
       </p:ext>
     </p:extLst>
   </p:cSld>
@@ -3218,7 +3218,7 @@
           <a:p>
             <a:fld id="{DC6A871B-4800-495F-AC75-93D44C7DEBA5}" type="datetime6">
               <a:rPr lang="ko-KR" altLang="en-US" smtClean="0"/>
-              <a:t>2024년 4월</a:t>
+              <a:t>2024년 5월</a:t>
             </a:fld>
             <a:endParaRPr lang="ko-KR" altLang="en-US"/>
           </a:p>
@@ -3281,7 +3281,7 @@
     </p:spTree>
     <p:extLst>
       <p:ext uri="{BB962C8B-B14F-4D97-AF65-F5344CB8AC3E}">
-        <p14:creationId xmlns:p14="http://schemas.microsoft.com/office/powerpoint/2010/main" val="4151279403"/>
+        <p14:creationId xmlns:p14="http://schemas.microsoft.com/office/powerpoint/2010/main" val="373673274"/>
       </p:ext>
     </p:extLst>
   </p:cSld>
@@ -3529,7 +3529,7 @@
           <a:p>
             <a:fld id="{59605888-30A6-49BB-95E2-DEAE4E5B09E9}" type="datetime6">
               <a:rPr lang="ko-KR" altLang="en-US" smtClean="0"/>
-              <a:t>2024년 4월</a:t>
+              <a:t>2024년 5월</a:t>
             </a:fld>
             <a:endParaRPr lang="ko-KR" altLang="en-US"/>
           </a:p>
@@ -3592,7 +3592,7 @@
     </p:spTree>
     <p:extLst>
       <p:ext uri="{BB962C8B-B14F-4D97-AF65-F5344CB8AC3E}">
-        <p14:creationId xmlns:p14="http://schemas.microsoft.com/office/powerpoint/2010/main" val="2972329800"/>
+        <p14:creationId xmlns:p14="http://schemas.microsoft.com/office/powerpoint/2010/main" val="3516951562"/>
       </p:ext>
     </p:extLst>
   </p:cSld>
@@ -3770,7 +3770,7 @@
           <a:p>
             <a:fld id="{8691C14A-5735-4A8B-B68B-DEC1DC2A3813}" type="datetime6">
               <a:rPr lang="ko-KR" altLang="en-US" smtClean="0"/>
-              <a:t>2024년 4월</a:t>
+              <a:t>2024년 5월</a:t>
             </a:fld>
             <a:endParaRPr lang="ko-KR" altLang="en-US"/>
           </a:p>
@@ -3959,24 +3959,24 @@
     </p:spTree>
     <p:extLst>
       <p:ext uri="{BB962C8B-B14F-4D97-AF65-F5344CB8AC3E}">
-        <p14:creationId xmlns:p14="http://schemas.microsoft.com/office/powerpoint/2010/main" val="3267343908"/>
+        <p14:creationId xmlns:p14="http://schemas.microsoft.com/office/powerpoint/2010/main" val="1961968626"/>
       </p:ext>
     </p:extLst>
   </p:cSld>
   <p:clrMap bg1="lt1" tx1="dk1" bg2="lt2" tx2="dk2" accent1="accent1" accent2="accent2" accent3="accent3" accent4="accent4" accent5="accent5" accent6="accent6" hlink="hlink" folHlink="folHlink"/>
   <p:sldLayoutIdLst>
-    <p:sldLayoutId id="2147483661" r:id="rId1"/>
-    <p:sldLayoutId id="2147483662" r:id="rId2"/>
-    <p:sldLayoutId id="2147483663" r:id="rId3"/>
-    <p:sldLayoutId id="2147483664" r:id="rId4"/>
-    <p:sldLayoutId id="2147483665" r:id="rId5"/>
-    <p:sldLayoutId id="2147483666" r:id="rId6"/>
-    <p:sldLayoutId id="2147483667" r:id="rId7"/>
-    <p:sldLayoutId id="2147483668" r:id="rId8"/>
-    <p:sldLayoutId id="2147483669" r:id="rId9"/>
-    <p:sldLayoutId id="2147483670" r:id="rId10"/>
-    <p:sldLayoutId id="2147483671" r:id="rId11"/>
-    <p:sldLayoutId id="2147483672" r:id="rId12"/>
+    <p:sldLayoutId id="2147483687" r:id="rId1"/>
+    <p:sldLayoutId id="2147483688" r:id="rId2"/>
+    <p:sldLayoutId id="2147483689" r:id="rId3"/>
+    <p:sldLayoutId id="2147483690" r:id="rId4"/>
+    <p:sldLayoutId id="2147483691" r:id="rId5"/>
+    <p:sldLayoutId id="2147483692" r:id="rId6"/>
+    <p:sldLayoutId id="2147483693" r:id="rId7"/>
+    <p:sldLayoutId id="2147483694" r:id="rId8"/>
+    <p:sldLayoutId id="2147483695" r:id="rId9"/>
+    <p:sldLayoutId id="2147483696" r:id="rId10"/>
+    <p:sldLayoutId id="2147483697" r:id="rId11"/>
+    <p:sldLayoutId id="2147483698" r:id="rId12"/>
   </p:sldLayoutIdLst>
   <p:hf hdr="0" ftr="0"/>
   <p:txStyles>
@@ -4341,7 +4341,7 @@
           <a:p>
             <a:fld id="{0E19CB95-6D28-40F1-9DA3-1BAC5D4B5B4F}" type="datetime6">
               <a:rPr lang="ko-KR" altLang="en-US" smtClean="0"/>
-              <a:t>2024년 4월</a:t>
+              <a:t>2024년 5월</a:t>
             </a:fld>
             <a:endParaRPr lang="ko-KR" altLang="en-US"/>
           </a:p>
@@ -4423,7 +4423,7 @@
           <a:p>
             <a:fld id="{0E19CB95-6D28-40F1-9DA3-1BAC5D4B5B4F}" type="datetime6">
               <a:rPr lang="ko-KR" altLang="en-US" smtClean="0"/>
-              <a:t>2024년 4월</a:t>
+              <a:t>2024년 5월</a:t>
             </a:fld>
             <a:endParaRPr lang="ko-KR" altLang="en-US"/>
           </a:p>
@@ -4630,7 +4630,7 @@
           <a:p>
             <a:fld id="{3C9CE3CE-253F-4F9D-BA15-C226C8D8501E}" type="datetime6">
               <a:rPr lang="ko-KR" altLang="en-US" smtClean="0"/>
-              <a:t>2024년 4월</a:t>
+              <a:t>2024년 5월</a:t>
             </a:fld>
             <a:endParaRPr lang="ko-KR" altLang="en-US"/>
           </a:p>
@@ -4899,7 +4899,7 @@
           <a:p>
             <a:fld id="{3C9CE3CE-253F-4F9D-BA15-C226C8D8501E}" type="datetime6">
               <a:rPr lang="ko-KR" altLang="en-US" smtClean="0"/>
-              <a:t>2024년 4월</a:t>
+              <a:t>2024년 5월</a:t>
             </a:fld>
             <a:endParaRPr lang="ko-KR" altLang="en-US"/>
           </a:p>
@@ -5050,7 +5050,7 @@
           <a:p>
             <a:fld id="{3C9CE3CE-253F-4F9D-BA15-C226C8D8501E}" type="datetime6">
               <a:rPr lang="ko-KR" altLang="en-US" smtClean="0"/>
-              <a:t>2024년 4월</a:t>
+              <a:t>2024년 5월</a:t>
             </a:fld>
             <a:endParaRPr lang="ko-KR" altLang="en-US"/>
           </a:p>
@@ -5135,7 +5135,7 @@
 </file>
 
 <file path=ppt/theme/theme1.xml><?xml version="1.0" encoding="utf-8"?>
-<a:theme xmlns:a="http://schemas.openxmlformats.org/drawingml/2006/main" name="1_Office 테마">
+<a:theme xmlns:a="http://schemas.openxmlformats.org/drawingml/2006/main" name="3_Office 테마">
   <a:themeElements>
     <a:clrScheme name="코딩온_새싹">
       <a:dk1>

--- a/material/[SeSAC_YDP_6] 00_양식.pptx
+++ b/material/[SeSAC_YDP_6] 00_양식.pptx
@@ -204,7 +204,7 @@
           <a:p>
             <a:fld id="{2EF3F159-7250-4DD4-91C2-13B35D56E1AF}" type="datetimeFigureOut">
               <a:rPr lang="ko-KR" altLang="en-US" smtClean="0"/>
-              <a:t>2024-05-10</a:t>
+              <a:t>2024-06-18</a:t>
             </a:fld>
             <a:endParaRPr lang="ko-KR" altLang="en-US"/>
           </a:p>
@@ -793,7 +793,7 @@
           <a:p>
             <a:fld id="{0E19CB95-6D28-40F1-9DA3-1BAC5D4B5B4F}" type="datetime6">
               <a:rPr lang="ko-KR" altLang="en-US" smtClean="0"/>
-              <a:t>2024년 5월</a:t>
+              <a:t>2024년 6월</a:t>
             </a:fld>
             <a:endParaRPr lang="ko-KR" altLang="en-US"/>
           </a:p>
@@ -1173,7 +1173,7 @@
           <a:p>
             <a:fld id="{C4A39A32-5728-48B8-9F9C-437D214CCAF1}" type="datetime6">
               <a:rPr lang="ko-KR" altLang="en-US" smtClean="0"/>
-              <a:t>2024년 5월</a:t>
+              <a:t>2024년 6월</a:t>
             </a:fld>
             <a:endParaRPr lang="ko-KR" altLang="en-US"/>
           </a:p>
@@ -1375,7 +1375,7 @@
           <a:p>
             <a:fld id="{3BECC8BA-EBCB-4BF9-8E87-970CE0138376}" type="datetime6">
               <a:rPr lang="ko-KR" altLang="en-US" smtClean="0"/>
-              <a:t>2024년 5월</a:t>
+              <a:t>2024년 6월</a:t>
             </a:fld>
             <a:endParaRPr lang="ko-KR" altLang="en-US"/>
           </a:p>
@@ -1583,7 +1583,7 @@
           <a:p>
             <a:fld id="{7869FA6E-4699-4AC6-B2CB-4E60A58ED7A8}" type="datetime6">
               <a:rPr lang="ko-KR" altLang="en-US" smtClean="0"/>
-              <a:t>2024년 5월</a:t>
+              <a:t>2024년 6월</a:t>
             </a:fld>
             <a:endParaRPr lang="ko-KR" altLang="en-US"/>
           </a:p>
@@ -1696,7 +1696,7 @@
           <a:p>
             <a:fld id="{0E19CB95-6D28-40F1-9DA3-1BAC5D4B5B4F}" type="datetime6">
               <a:rPr lang="ko-KR" altLang="en-US" smtClean="0"/>
-              <a:t>2024년 5월</a:t>
+              <a:t>2024년 6월</a:t>
             </a:fld>
             <a:endParaRPr lang="ko-KR" altLang="en-US"/>
           </a:p>
@@ -1958,7 +1958,7 @@
           <a:p>
             <a:fld id="{3C9CE3CE-253F-4F9D-BA15-C226C8D8501E}" type="datetime6">
               <a:rPr lang="ko-KR" altLang="en-US" smtClean="0"/>
-              <a:t>2024년 5월</a:t>
+              <a:t>2024년 6월</a:t>
             </a:fld>
             <a:endParaRPr lang="ko-KR" altLang="en-US"/>
           </a:p>
@@ -2275,7 +2275,7 @@
           <a:p>
             <a:fld id="{BE5A7087-D460-46DD-B430-F8D9B9677D08}" type="datetime6">
               <a:rPr lang="ko-KR" altLang="en-US" smtClean="0"/>
-              <a:t>2024년 5월</a:t>
+              <a:t>2024년 6월</a:t>
             </a:fld>
             <a:endParaRPr lang="ko-KR" altLang="en-US"/>
           </a:p>
@@ -2544,7 +2544,7 @@
           <a:p>
             <a:fld id="{0581BA25-D675-4234-A003-8449BDEEF18E}" type="datetime6">
               <a:rPr lang="ko-KR" altLang="en-US" smtClean="0"/>
-              <a:t>2024년 5월</a:t>
+              <a:t>2024년 6월</a:t>
             </a:fld>
             <a:endParaRPr lang="ko-KR" altLang="en-US"/>
           </a:p>
@@ -2960,7 +2960,7 @@
           <a:p>
             <a:fld id="{26155C29-A87F-46F0-A24C-6C9F0A4BF6AA}" type="datetime6">
               <a:rPr lang="ko-KR" altLang="en-US" smtClean="0"/>
-              <a:t>2024년 5월</a:t>
+              <a:t>2024년 6월</a:t>
             </a:fld>
             <a:endParaRPr lang="ko-KR" altLang="en-US"/>
           </a:p>
@@ -3105,7 +3105,7 @@
           <a:p>
             <a:fld id="{DD2EDD62-8757-43DB-BAE0-460422B548EA}" type="datetime6">
               <a:rPr lang="ko-KR" altLang="en-US" smtClean="0"/>
-              <a:t>2024년 5월</a:t>
+              <a:t>2024년 6월</a:t>
             </a:fld>
             <a:endParaRPr lang="ko-KR" altLang="en-US"/>
           </a:p>
@@ -3218,7 +3218,7 @@
           <a:p>
             <a:fld id="{DC6A871B-4800-495F-AC75-93D44C7DEBA5}" type="datetime6">
               <a:rPr lang="ko-KR" altLang="en-US" smtClean="0"/>
-              <a:t>2024년 5월</a:t>
+              <a:t>2024년 6월</a:t>
             </a:fld>
             <a:endParaRPr lang="ko-KR" altLang="en-US"/>
           </a:p>
@@ -3529,7 +3529,7 @@
           <a:p>
             <a:fld id="{59605888-30A6-49BB-95E2-DEAE4E5B09E9}" type="datetime6">
               <a:rPr lang="ko-KR" altLang="en-US" smtClean="0"/>
-              <a:t>2024년 5월</a:t>
+              <a:t>2024년 6월</a:t>
             </a:fld>
             <a:endParaRPr lang="ko-KR" altLang="en-US"/>
           </a:p>
@@ -3770,7 +3770,7 @@
           <a:p>
             <a:fld id="{8691C14A-5735-4A8B-B68B-DEC1DC2A3813}" type="datetime6">
               <a:rPr lang="ko-KR" altLang="en-US" smtClean="0"/>
-              <a:t>2024년 5월</a:t>
+              <a:t>2024년 6월</a:t>
             </a:fld>
             <a:endParaRPr lang="ko-KR" altLang="en-US"/>
           </a:p>
@@ -4341,7 +4341,7 @@
           <a:p>
             <a:fld id="{0E19CB95-6D28-40F1-9DA3-1BAC5D4B5B4F}" type="datetime6">
               <a:rPr lang="ko-KR" altLang="en-US" smtClean="0"/>
-              <a:t>2024년 5월</a:t>
+              <a:t>2024년 6월</a:t>
             </a:fld>
             <a:endParaRPr lang="ko-KR" altLang="en-US"/>
           </a:p>
@@ -4423,7 +4423,7 @@
           <a:p>
             <a:fld id="{0E19CB95-6D28-40F1-9DA3-1BAC5D4B5B4F}" type="datetime6">
               <a:rPr lang="ko-KR" altLang="en-US" smtClean="0"/>
-              <a:t>2024년 5월</a:t>
+              <a:t>2024년 6월</a:t>
             </a:fld>
             <a:endParaRPr lang="ko-KR" altLang="en-US"/>
           </a:p>
@@ -4630,7 +4630,7 @@
           <a:p>
             <a:fld id="{3C9CE3CE-253F-4F9D-BA15-C226C8D8501E}" type="datetime6">
               <a:rPr lang="ko-KR" altLang="en-US" smtClean="0"/>
-              <a:t>2024년 5월</a:t>
+              <a:t>2024년 6월</a:t>
             </a:fld>
             <a:endParaRPr lang="ko-KR" altLang="en-US"/>
           </a:p>
@@ -4899,7 +4899,7 @@
           <a:p>
             <a:fld id="{3C9CE3CE-253F-4F9D-BA15-C226C8D8501E}" type="datetime6">
               <a:rPr lang="ko-KR" altLang="en-US" smtClean="0"/>
-              <a:t>2024년 5월</a:t>
+              <a:t>2024년 6월</a:t>
             </a:fld>
             <a:endParaRPr lang="ko-KR" altLang="en-US"/>
           </a:p>
@@ -5050,7 +5050,7 @@
           <a:p>
             <a:fld id="{3C9CE3CE-253F-4F9D-BA15-C226C8D8501E}" type="datetime6">
               <a:rPr lang="ko-KR" altLang="en-US" smtClean="0"/>
-              <a:t>2024년 5월</a:t>
+              <a:t>2024년 6월</a:t>
             </a:fld>
             <a:endParaRPr lang="ko-KR" altLang="en-US"/>
           </a:p>

--- a/material/[SeSAC_YDP_6] 00_양식.pptx
+++ b/material/[SeSAC_YDP_6] 00_양식.pptx
@@ -204,7 +204,7 @@
           <a:p>
             <a:fld id="{2EF3F159-7250-4DD4-91C2-13B35D56E1AF}" type="datetimeFigureOut">
               <a:rPr lang="ko-KR" altLang="en-US" smtClean="0"/>
-              <a:t>2024-06-18</a:t>
+              <a:t>2024-07-02</a:t>
             </a:fld>
             <a:endParaRPr lang="ko-KR" altLang="en-US"/>
           </a:p>
@@ -793,7 +793,7 @@
           <a:p>
             <a:fld id="{0E19CB95-6D28-40F1-9DA3-1BAC5D4B5B4F}" type="datetime6">
               <a:rPr lang="ko-KR" altLang="en-US" smtClean="0"/>
-              <a:t>2024년 6월</a:t>
+              <a:t>2024년 7월</a:t>
             </a:fld>
             <a:endParaRPr lang="ko-KR" altLang="en-US"/>
           </a:p>
@@ -1173,7 +1173,7 @@
           <a:p>
             <a:fld id="{C4A39A32-5728-48B8-9F9C-437D214CCAF1}" type="datetime6">
               <a:rPr lang="ko-KR" altLang="en-US" smtClean="0"/>
-              <a:t>2024년 6월</a:t>
+              <a:t>2024년 7월</a:t>
             </a:fld>
             <a:endParaRPr lang="ko-KR" altLang="en-US"/>
           </a:p>
@@ -1375,7 +1375,7 @@
           <a:p>
             <a:fld id="{3BECC8BA-EBCB-4BF9-8E87-970CE0138376}" type="datetime6">
               <a:rPr lang="ko-KR" altLang="en-US" smtClean="0"/>
-              <a:t>2024년 6월</a:t>
+              <a:t>2024년 7월</a:t>
             </a:fld>
             <a:endParaRPr lang="ko-KR" altLang="en-US"/>
           </a:p>
@@ -1583,7 +1583,7 @@
           <a:p>
             <a:fld id="{7869FA6E-4699-4AC6-B2CB-4E60A58ED7A8}" type="datetime6">
               <a:rPr lang="ko-KR" altLang="en-US" smtClean="0"/>
-              <a:t>2024년 6월</a:t>
+              <a:t>2024년 7월</a:t>
             </a:fld>
             <a:endParaRPr lang="ko-KR" altLang="en-US"/>
           </a:p>
@@ -1696,7 +1696,7 @@
           <a:p>
             <a:fld id="{0E19CB95-6D28-40F1-9DA3-1BAC5D4B5B4F}" type="datetime6">
               <a:rPr lang="ko-KR" altLang="en-US" smtClean="0"/>
-              <a:t>2024년 6월</a:t>
+              <a:t>2024년 7월</a:t>
             </a:fld>
             <a:endParaRPr lang="ko-KR" altLang="en-US"/>
           </a:p>
@@ -1958,7 +1958,7 @@
           <a:p>
             <a:fld id="{3C9CE3CE-253F-4F9D-BA15-C226C8D8501E}" type="datetime6">
               <a:rPr lang="ko-KR" altLang="en-US" smtClean="0"/>
-              <a:t>2024년 6월</a:t>
+              <a:t>2024년 7월</a:t>
             </a:fld>
             <a:endParaRPr lang="ko-KR" altLang="en-US"/>
           </a:p>
@@ -2275,7 +2275,7 @@
           <a:p>
             <a:fld id="{BE5A7087-D460-46DD-B430-F8D9B9677D08}" type="datetime6">
               <a:rPr lang="ko-KR" altLang="en-US" smtClean="0"/>
-              <a:t>2024년 6월</a:t>
+              <a:t>2024년 7월</a:t>
             </a:fld>
             <a:endParaRPr lang="ko-KR" altLang="en-US"/>
           </a:p>
@@ -2544,7 +2544,7 @@
           <a:p>
             <a:fld id="{0581BA25-D675-4234-A003-8449BDEEF18E}" type="datetime6">
               <a:rPr lang="ko-KR" altLang="en-US" smtClean="0"/>
-              <a:t>2024년 6월</a:t>
+              <a:t>2024년 7월</a:t>
             </a:fld>
             <a:endParaRPr lang="ko-KR" altLang="en-US"/>
           </a:p>
@@ -2960,7 +2960,7 @@
           <a:p>
             <a:fld id="{26155C29-A87F-46F0-A24C-6C9F0A4BF6AA}" type="datetime6">
               <a:rPr lang="ko-KR" altLang="en-US" smtClean="0"/>
-              <a:t>2024년 6월</a:t>
+              <a:t>2024년 7월</a:t>
             </a:fld>
             <a:endParaRPr lang="ko-KR" altLang="en-US"/>
           </a:p>
@@ -3105,7 +3105,7 @@
           <a:p>
             <a:fld id="{DD2EDD62-8757-43DB-BAE0-460422B548EA}" type="datetime6">
               <a:rPr lang="ko-KR" altLang="en-US" smtClean="0"/>
-              <a:t>2024년 6월</a:t>
+              <a:t>2024년 7월</a:t>
             </a:fld>
             <a:endParaRPr lang="ko-KR" altLang="en-US"/>
           </a:p>
@@ -3218,7 +3218,7 @@
           <a:p>
             <a:fld id="{DC6A871B-4800-495F-AC75-93D44C7DEBA5}" type="datetime6">
               <a:rPr lang="ko-KR" altLang="en-US" smtClean="0"/>
-              <a:t>2024년 6월</a:t>
+              <a:t>2024년 7월</a:t>
             </a:fld>
             <a:endParaRPr lang="ko-KR" altLang="en-US"/>
           </a:p>
@@ -3529,7 +3529,7 @@
           <a:p>
             <a:fld id="{59605888-30A6-49BB-95E2-DEAE4E5B09E9}" type="datetime6">
               <a:rPr lang="ko-KR" altLang="en-US" smtClean="0"/>
-              <a:t>2024년 6월</a:t>
+              <a:t>2024년 7월</a:t>
             </a:fld>
             <a:endParaRPr lang="ko-KR" altLang="en-US"/>
           </a:p>
@@ -3770,7 +3770,7 @@
           <a:p>
             <a:fld id="{8691C14A-5735-4A8B-B68B-DEC1DC2A3813}" type="datetime6">
               <a:rPr lang="ko-KR" altLang="en-US" smtClean="0"/>
-              <a:t>2024년 6월</a:t>
+              <a:t>2024년 7월</a:t>
             </a:fld>
             <a:endParaRPr lang="ko-KR" altLang="en-US"/>
           </a:p>
@@ -4341,7 +4341,7 @@
           <a:p>
             <a:fld id="{0E19CB95-6D28-40F1-9DA3-1BAC5D4B5B4F}" type="datetime6">
               <a:rPr lang="ko-KR" altLang="en-US" smtClean="0"/>
-              <a:t>2024년 6월</a:t>
+              <a:t>2024년 7월</a:t>
             </a:fld>
             <a:endParaRPr lang="ko-KR" altLang="en-US"/>
           </a:p>
@@ -4423,7 +4423,7 @@
           <a:p>
             <a:fld id="{0E19CB95-6D28-40F1-9DA3-1BAC5D4B5B4F}" type="datetime6">
               <a:rPr lang="ko-KR" altLang="en-US" smtClean="0"/>
-              <a:t>2024년 6월</a:t>
+              <a:t>2024년 7월</a:t>
             </a:fld>
             <a:endParaRPr lang="ko-KR" altLang="en-US"/>
           </a:p>
@@ -4630,7 +4630,7 @@
           <a:p>
             <a:fld id="{3C9CE3CE-253F-4F9D-BA15-C226C8D8501E}" type="datetime6">
               <a:rPr lang="ko-KR" altLang="en-US" smtClean="0"/>
-              <a:t>2024년 6월</a:t>
+              <a:t>2024년 7월</a:t>
             </a:fld>
             <a:endParaRPr lang="ko-KR" altLang="en-US"/>
           </a:p>
@@ -4899,7 +4899,7 @@
           <a:p>
             <a:fld id="{3C9CE3CE-253F-4F9D-BA15-C226C8D8501E}" type="datetime6">
               <a:rPr lang="ko-KR" altLang="en-US" smtClean="0"/>
-              <a:t>2024년 6월</a:t>
+              <a:t>2024년 7월</a:t>
             </a:fld>
             <a:endParaRPr lang="ko-KR" altLang="en-US"/>
           </a:p>
@@ -5050,7 +5050,7 @@
           <a:p>
             <a:fld id="{3C9CE3CE-253F-4F9D-BA15-C226C8D8501E}" type="datetime6">
               <a:rPr lang="ko-KR" altLang="en-US" smtClean="0"/>
-              <a:t>2024년 6월</a:t>
+              <a:t>2024년 7월</a:t>
             </a:fld>
             <a:endParaRPr lang="ko-KR" altLang="en-US"/>
           </a:p>
@@ -5175,15 +5175,15 @@
         <a:srgbClr val="954F72"/>
       </a:folHlink>
     </a:clrScheme>
-    <a:fontScheme name="PretendardGOV">
+    <a:fontScheme name="Pretendard GOV">
       <a:majorFont>
-        <a:latin typeface="PretendardGOV"/>
-        <a:ea typeface="PretendardGOV"/>
+        <a:latin typeface="Pretendard GOV"/>
+        <a:ea typeface="Pretendard GOV"/>
         <a:cs typeface=""/>
       </a:majorFont>
       <a:minorFont>
-        <a:latin typeface="PretendardGOV"/>
-        <a:ea typeface="PretendardGOV"/>
+        <a:latin typeface="Pretendard GOV"/>
+        <a:ea typeface="Pretendard GOV"/>
         <a:cs typeface=""/>
       </a:minorFont>
     </a:fontScheme>
